--- a/cursos/recursos/el-mapa-de-los-finales/03-torre-contra-caballo.pptx
+++ b/cursos/recursos/el-mapa-de-los-finales/03-torre-contra-caballo.pptx
@@ -3892,7 +3892,7 @@
                 </a:solidFill>
                 <a:latin typeface="Calibri"/>
               </a:rPr>
-              <a:t>Jugá las dos posiciones del rincón contra el motor, primero con la torre y después defendiendo con el caballo.</a:t>
+              <a:t>Juega las dos posiciones del rincón contra el motor, primero con la torre y después defendiendo con el caballo.</a:t>
             </a:r>
           </a:p>
           <a:p>
@@ -3963,7 +3963,7 @@
                 </a:solidFill>
                 <a:latin typeface="Calibri"/>
               </a:rPr>
-              <a:t>•  Recorré cada línea principal hasta entender el porqué de cada jugada.</a:t>
+              <a:t>•  Recorre cada línea principal hasta entender el porqué de cada jugada.</a:t>
             </a:r>
           </a:p>
           <a:p>
@@ -3979,7 +3979,7 @@
                 </a:solidFill>
                 <a:latin typeface="Calibri"/>
               </a:rPr>
-              <a:t>•  Practicá primero las posiciones clave, después las demás.</a:t>
+              <a:t>•  Practica primero las posiciones clave, después las demás.</a:t>
             </a:r>
           </a:p>
           <a:p>
@@ -3995,7 +3995,7 @@
                 </a:solidFill>
                 <a:latin typeface="Calibri"/>
               </a:rPr>
-              <a:t>•  Anotá las reglas de cada final con tus palabras.</a:t>
+              <a:t>•  Anota las reglas de cada final con tus palabras.</a:t>
             </a:r>
           </a:p>
         </p:txBody>
